--- a/src/Verify.OpenXml.Tests/Samples.VerifyPowerpointStream.verified.pptx
+++ b/src/Verify.OpenXml.Tests/Samples.VerifyPowerpointStream.verified.pptx
@@ -101,12 +101,12 @@
     </a:clrScheme>
     <a:fontScheme name="Office">
       <a:majorFont>
-        <a:latin typeface="Calibri"/>
+        <a:latin typeface="Aptos"/>
         <a:ea typeface=""/>
         <a:cs typeface=""/>
       </a:majorFont>
       <a:minorFont>
-        <a:latin typeface="Calibri"/>
+        <a:latin typeface="Aptos"/>
         <a:ea typeface=""/>
         <a:cs typeface=""/>
       </a:minorFont>
